--- a/catalog/samples/stat_table_readout.pptx
+++ b/catalog/samples/stat_table_readout.pptx
@@ -1272,7 +1272,7 @@
           </a:p>
           <a:p>
             <a:r>
-              <a:t>  "template_sha256": "9e2fd4dc9825acd172469a114a4338a6c6486ee80aac8500278f0ac55dd954c0"</a:t>
+              <a:t>  "template_sha256": "caa979593139d00ea3ff4a2b99a69d8f46eb91c87891f719ff4b3e9cf6b5dd7c"</a:t>
             </a:r>
           </a:p>
           <a:p>
